--- a/assets/abstract_predicitons.pptx
+++ b/assets/abstract_predicitons.pptx
@@ -2,7 +2,7 @@
 <file path=ppt/presentation.xml><?xml version="1.0" encoding="utf-8"?>
 <p:presentation xmlns:a="http://schemas.openxmlformats.org/drawingml/2006/main" xmlns:r="http://schemas.openxmlformats.org/officeDocument/2006/relationships" xmlns:p="http://schemas.openxmlformats.org/presentationml/2006/main" saveSubsetFonts="1">
   <p:sldMasterIdLst>
-    <p:sldMasterId id="2147483684" r:id="rId1"/>
+    <p:sldMasterId id="2147483768" r:id="rId1"/>
   </p:sldMasterIdLst>
   <p:notesMasterIdLst>
     <p:notesMasterId r:id="rId5"/>
@@ -12,7 +12,7 @@
     <p:sldId id="449" r:id="rId3"/>
     <p:sldId id="450" r:id="rId4"/>
   </p:sldIdLst>
-  <p:sldSz cx="12192000" cy="6858000"/>
+  <p:sldSz cx="12192000" cy="3292475"/>
   <p:notesSz cx="6858000" cy="9144000"/>
   <p:defaultTextStyle>
     <a:defPPr>
@@ -112,12 +112,12 @@
   <p:extLst>
     <p:ext uri="{EFAFB233-063F-42B5-8137-9DF3F51BA10A}">
       <p15:sldGuideLst xmlns:p15="http://schemas.microsoft.com/office/powerpoint/2012/main">
-        <p15:guide id="1" orient="horz" pos="2160">
+        <p15:guide id="1" orient="horz" pos="1037" userDrawn="1">
           <p15:clr>
             <a:srgbClr val="A4A3A4"/>
           </p15:clr>
         </p15:guide>
-        <p15:guide id="2" pos="3840">
+        <p15:guide id="2" pos="3840" userDrawn="1">
           <p15:clr>
             <a:srgbClr val="A4A3A4"/>
           </p15:clr>
@@ -238,8 +238,8 @@
         </p:nvSpPr>
         <p:spPr>
           <a:xfrm>
-            <a:off x="685800" y="1143000"/>
-            <a:ext cx="5486400" cy="3086100"/>
+            <a:off x="-2284413" y="1143000"/>
+            <a:ext cx="11426826" cy="3086100"/>
           </a:xfrm>
           <a:prstGeom prst="rect">
             <a:avLst/>
@@ -490,7 +490,7 @@
 
 <file path=ppt/slideLayouts/slideLayout1.xml><?xml version="1.0" encoding="utf-8"?>
 <p:sldLayout xmlns:a="http://schemas.openxmlformats.org/drawingml/2006/main" xmlns:r="http://schemas.openxmlformats.org/officeDocument/2006/relationships" xmlns:p="http://schemas.openxmlformats.org/presentationml/2006/main" type="title" preserve="1">
-  <p:cSld name="Diapositiva de título">
+  <p:cSld name="Title Slide">
     <p:spTree>
       <p:nvGrpSpPr>
         <p:cNvPr id="1" name=""/>
@@ -517,21 +517,21 @@
         </p:nvSpPr>
         <p:spPr>
           <a:xfrm>
-            <a:off x="1524000" y="1122363"/>
-            <a:ext cx="9144000" cy="2387600"/>
+            <a:off x="1524000" y="538838"/>
+            <a:ext cx="9144000" cy="1146269"/>
           </a:xfrm>
         </p:spPr>
         <p:txBody>
           <a:bodyPr anchor="b"/>
           <a:lstStyle>
             <a:lvl1pPr algn="ctr">
-              <a:defRPr sz="6000"/>
+              <a:defRPr sz="2881"/>
             </a:lvl1pPr>
           </a:lstStyle>
           <a:p>
             <a:r>
-              <a:rPr lang="es-ES"/>
-              <a:t>Haga clic para modificar el estilo de título del patrón</a:t>
+              <a:rPr lang="en-US"/>
+              <a:t>Click to edit Master title style</a:t>
             </a:r>
             <a:endParaRPr lang="en-US" dirty="0"/>
           </a:p>
@@ -549,8 +549,8 @@
         </p:nvSpPr>
         <p:spPr>
           <a:xfrm>
-            <a:off x="1524000" y="3602038"/>
-            <a:ext cx="9144000" cy="1655762"/>
+            <a:off x="1524000" y="1729312"/>
+            <a:ext cx="9144000" cy="794919"/>
           </a:xfrm>
         </p:spPr>
         <p:txBody>
@@ -558,45 +558,45 @@
           <a:lstStyle>
             <a:lvl1pPr marL="0" indent="0" algn="ctr">
               <a:buNone/>
-              <a:defRPr sz="2400"/>
+              <a:defRPr sz="1152"/>
             </a:lvl1pPr>
-            <a:lvl2pPr marL="457200" indent="0" algn="ctr">
-              <a:buNone/>
-              <a:defRPr sz="2000"/>
+            <a:lvl2pPr marL="219502" indent="0" algn="ctr">
+              <a:buNone/>
+              <a:defRPr sz="960"/>
             </a:lvl2pPr>
-            <a:lvl3pPr marL="914400" indent="0" algn="ctr">
-              <a:buNone/>
-              <a:defRPr sz="1800"/>
+            <a:lvl3pPr marL="439003" indent="0" algn="ctr">
+              <a:buNone/>
+              <a:defRPr sz="864"/>
             </a:lvl3pPr>
-            <a:lvl4pPr marL="1371600" indent="0" algn="ctr">
-              <a:buNone/>
-              <a:defRPr sz="1600"/>
+            <a:lvl4pPr marL="658505" indent="0" algn="ctr">
+              <a:buNone/>
+              <a:defRPr sz="768"/>
             </a:lvl4pPr>
-            <a:lvl5pPr marL="1828800" indent="0" algn="ctr">
-              <a:buNone/>
-              <a:defRPr sz="1600"/>
+            <a:lvl5pPr marL="878007" indent="0" algn="ctr">
+              <a:buNone/>
+              <a:defRPr sz="768"/>
             </a:lvl5pPr>
-            <a:lvl6pPr marL="2286000" indent="0" algn="ctr">
-              <a:buNone/>
-              <a:defRPr sz="1600"/>
+            <a:lvl6pPr marL="1097509" indent="0" algn="ctr">
+              <a:buNone/>
+              <a:defRPr sz="768"/>
             </a:lvl6pPr>
-            <a:lvl7pPr marL="2743200" indent="0" algn="ctr">
-              <a:buNone/>
-              <a:defRPr sz="1600"/>
+            <a:lvl7pPr marL="1317010" indent="0" algn="ctr">
+              <a:buNone/>
+              <a:defRPr sz="768"/>
             </a:lvl7pPr>
-            <a:lvl8pPr marL="3200400" indent="0" algn="ctr">
-              <a:buNone/>
-              <a:defRPr sz="1600"/>
+            <a:lvl8pPr marL="1536512" indent="0" algn="ctr">
+              <a:buNone/>
+              <a:defRPr sz="768"/>
             </a:lvl8pPr>
-            <a:lvl9pPr marL="3657600" indent="0" algn="ctr">
-              <a:buNone/>
-              <a:defRPr sz="1600"/>
+            <a:lvl9pPr marL="1756014" indent="0" algn="ctr">
+              <a:buNone/>
+              <a:defRPr sz="768"/>
             </a:lvl9pPr>
           </a:lstStyle>
           <a:p>
             <a:r>
-              <a:rPr lang="es-ES"/>
-              <a:t>Haga clic para modificar el estilo de subtítulo del patrón</a:t>
+              <a:rPr lang="en-US"/>
+              <a:t>Click to edit Master subtitle style</a:t>
             </a:r>
             <a:endParaRPr lang="en-US" dirty="0"/>
           </a:p>
@@ -670,7 +670,7 @@
     </p:spTree>
     <p:extLst>
       <p:ext uri="{BB962C8B-B14F-4D97-AF65-F5344CB8AC3E}">
-        <p14:creationId xmlns:p14="http://schemas.microsoft.com/office/powerpoint/2010/main" val="3639249660"/>
+        <p14:creationId xmlns:p14="http://schemas.microsoft.com/office/powerpoint/2010/main" val="2224984337"/>
       </p:ext>
     </p:extLst>
   </p:cSld>
@@ -682,7 +682,7 @@
 
 <file path=ppt/slideLayouts/slideLayout10.xml><?xml version="1.0" encoding="utf-8"?>
 <p:sldLayout xmlns:a="http://schemas.openxmlformats.org/drawingml/2006/main" xmlns:r="http://schemas.openxmlformats.org/officeDocument/2006/relationships" xmlns:p="http://schemas.openxmlformats.org/presentationml/2006/main" type="vertTx" preserve="1">
-  <p:cSld name="Título y texto vertical">
+  <p:cSld name="Title and Vertical Text">
     <p:spTree>
       <p:nvGrpSpPr>
         <p:cNvPr id="1" name=""/>
@@ -713,8 +713,8 @@
           <a:lstStyle/>
           <a:p>
             <a:r>
-              <a:rPr lang="es-ES"/>
-              <a:t>Haga clic para modificar el estilo de título del patrón</a:t>
+              <a:rPr lang="en-US"/>
+              <a:t>Click to edit Master title style</a:t>
             </a:r>
             <a:endParaRPr lang="en-US" dirty="0"/>
           </a:p>
@@ -737,36 +737,36 @@
           <a:p>
             <a:pPr lvl="0"/>
             <a:r>
-              <a:rPr lang="es-ES"/>
-              <a:t>Haga clic para modificar los estilos de texto del patrón</a:t>
+              <a:rPr lang="en-US"/>
+              <a:t>Click to edit Master text styles</a:t>
             </a:r>
           </a:p>
           <a:p>
             <a:pPr lvl="1"/>
             <a:r>
-              <a:rPr lang="es-ES"/>
-              <a:t>Segundo nivel</a:t>
+              <a:rPr lang="en-US"/>
+              <a:t>Second level</a:t>
             </a:r>
           </a:p>
           <a:p>
             <a:pPr lvl="2"/>
             <a:r>
-              <a:rPr lang="es-ES"/>
-              <a:t>Tercer nivel</a:t>
+              <a:rPr lang="en-US"/>
+              <a:t>Third level</a:t>
             </a:r>
           </a:p>
           <a:p>
             <a:pPr lvl="3"/>
             <a:r>
-              <a:rPr lang="es-ES"/>
-              <a:t>Cuarto nivel</a:t>
+              <a:rPr lang="en-US"/>
+              <a:t>Fourth level</a:t>
             </a:r>
           </a:p>
           <a:p>
             <a:pPr lvl="4"/>
             <a:r>
-              <a:rPr lang="es-ES"/>
-              <a:t>Quinto nivel</a:t>
+              <a:rPr lang="en-US"/>
+              <a:t>Fifth level</a:t>
             </a:r>
             <a:endParaRPr lang="en-US" dirty="0"/>
           </a:p>
@@ -840,7 +840,7 @@
     </p:spTree>
     <p:extLst>
       <p:ext uri="{BB962C8B-B14F-4D97-AF65-F5344CB8AC3E}">
-        <p14:creationId xmlns:p14="http://schemas.microsoft.com/office/powerpoint/2010/main" val="1534361718"/>
+        <p14:creationId xmlns:p14="http://schemas.microsoft.com/office/powerpoint/2010/main" val="504363323"/>
       </p:ext>
     </p:extLst>
   </p:cSld>
@@ -852,7 +852,7 @@
 
 <file path=ppt/slideLayouts/slideLayout11.xml><?xml version="1.0" encoding="utf-8"?>
 <p:sldLayout xmlns:a="http://schemas.openxmlformats.org/drawingml/2006/main" xmlns:r="http://schemas.openxmlformats.org/officeDocument/2006/relationships" xmlns:p="http://schemas.openxmlformats.org/presentationml/2006/main" type="vertTitleAndTx" preserve="1">
-  <p:cSld name="Título vertical y texto">
+  <p:cSld name="Vertical Title and Text">
     <p:spTree>
       <p:nvGrpSpPr>
         <p:cNvPr id="1" name=""/>
@@ -879,8 +879,8 @@
         </p:nvSpPr>
         <p:spPr>
           <a:xfrm>
-            <a:off x="8724900" y="365125"/>
-            <a:ext cx="2628900" cy="5811838"/>
+            <a:off x="8724900" y="175294"/>
+            <a:ext cx="2628900" cy="2790220"/>
           </a:xfrm>
         </p:spPr>
         <p:txBody>
@@ -888,8 +888,8 @@
           <a:lstStyle/>
           <a:p>
             <a:r>
-              <a:rPr lang="es-ES"/>
-              <a:t>Haga clic para modificar el estilo de título del patrón</a:t>
+              <a:rPr lang="en-US"/>
+              <a:t>Click to edit Master title style</a:t>
             </a:r>
             <a:endParaRPr lang="en-US" dirty="0"/>
           </a:p>
@@ -907,8 +907,8 @@
         </p:nvSpPr>
         <p:spPr>
           <a:xfrm>
-            <a:off x="838200" y="365125"/>
-            <a:ext cx="7734300" cy="5811838"/>
+            <a:off x="838200" y="175294"/>
+            <a:ext cx="7734300" cy="2790220"/>
           </a:xfrm>
         </p:spPr>
         <p:txBody>
@@ -917,36 +917,36 @@
           <a:p>
             <a:pPr lvl="0"/>
             <a:r>
-              <a:rPr lang="es-ES"/>
-              <a:t>Haga clic para modificar los estilos de texto del patrón</a:t>
+              <a:rPr lang="en-US"/>
+              <a:t>Click to edit Master text styles</a:t>
             </a:r>
           </a:p>
           <a:p>
             <a:pPr lvl="1"/>
             <a:r>
-              <a:rPr lang="es-ES"/>
-              <a:t>Segundo nivel</a:t>
+              <a:rPr lang="en-US"/>
+              <a:t>Second level</a:t>
             </a:r>
           </a:p>
           <a:p>
             <a:pPr lvl="2"/>
             <a:r>
-              <a:rPr lang="es-ES"/>
-              <a:t>Tercer nivel</a:t>
+              <a:rPr lang="en-US"/>
+              <a:t>Third level</a:t>
             </a:r>
           </a:p>
           <a:p>
             <a:pPr lvl="3"/>
             <a:r>
-              <a:rPr lang="es-ES"/>
-              <a:t>Cuarto nivel</a:t>
+              <a:rPr lang="en-US"/>
+              <a:t>Fourth level</a:t>
             </a:r>
           </a:p>
           <a:p>
             <a:pPr lvl="4"/>
             <a:r>
-              <a:rPr lang="es-ES"/>
-              <a:t>Quinto nivel</a:t>
+              <a:rPr lang="en-US"/>
+              <a:t>Fifth level</a:t>
             </a:r>
             <a:endParaRPr lang="en-US" dirty="0"/>
           </a:p>
@@ -1020,7 +1020,7 @@
     </p:spTree>
     <p:extLst>
       <p:ext uri="{BB962C8B-B14F-4D97-AF65-F5344CB8AC3E}">
-        <p14:creationId xmlns:p14="http://schemas.microsoft.com/office/powerpoint/2010/main" val="366435864"/>
+        <p14:creationId xmlns:p14="http://schemas.microsoft.com/office/powerpoint/2010/main" val="1028324465"/>
       </p:ext>
     </p:extLst>
   </p:cSld>
@@ -1032,7 +1032,7 @@
 
 <file path=ppt/slideLayouts/slideLayout2.xml><?xml version="1.0" encoding="utf-8"?>
 <p:sldLayout xmlns:a="http://schemas.openxmlformats.org/drawingml/2006/main" xmlns:r="http://schemas.openxmlformats.org/officeDocument/2006/relationships" xmlns:p="http://schemas.openxmlformats.org/presentationml/2006/main" type="obj" preserve="1">
-  <p:cSld name="Título y objetos">
+  <p:cSld name="Title and Content">
     <p:spTree>
       <p:nvGrpSpPr>
         <p:cNvPr id="1" name=""/>
@@ -1063,8 +1063,8 @@
           <a:lstStyle/>
           <a:p>
             <a:r>
-              <a:rPr lang="es-ES"/>
-              <a:t>Haga clic para modificar el estilo de título del patrón</a:t>
+              <a:rPr lang="en-US"/>
+              <a:t>Click to edit Master title style</a:t>
             </a:r>
             <a:endParaRPr lang="en-US" dirty="0"/>
           </a:p>
@@ -1087,36 +1087,36 @@
           <a:p>
             <a:pPr lvl="0"/>
             <a:r>
-              <a:rPr lang="es-ES"/>
-              <a:t>Haga clic para modificar los estilos de texto del patrón</a:t>
+              <a:rPr lang="en-US"/>
+              <a:t>Click to edit Master text styles</a:t>
             </a:r>
           </a:p>
           <a:p>
             <a:pPr lvl="1"/>
             <a:r>
-              <a:rPr lang="es-ES"/>
-              <a:t>Segundo nivel</a:t>
+              <a:rPr lang="en-US"/>
+              <a:t>Second level</a:t>
             </a:r>
           </a:p>
           <a:p>
             <a:pPr lvl="2"/>
             <a:r>
-              <a:rPr lang="es-ES"/>
-              <a:t>Tercer nivel</a:t>
+              <a:rPr lang="en-US"/>
+              <a:t>Third level</a:t>
             </a:r>
           </a:p>
           <a:p>
             <a:pPr lvl="3"/>
             <a:r>
-              <a:rPr lang="es-ES"/>
-              <a:t>Cuarto nivel</a:t>
+              <a:rPr lang="en-US"/>
+              <a:t>Fourth level</a:t>
             </a:r>
           </a:p>
           <a:p>
             <a:pPr lvl="4"/>
             <a:r>
-              <a:rPr lang="es-ES"/>
-              <a:t>Quinto nivel</a:t>
+              <a:rPr lang="en-US"/>
+              <a:t>Fifth level</a:t>
             </a:r>
             <a:endParaRPr lang="en-US" dirty="0"/>
           </a:p>
@@ -1190,7 +1190,7 @@
     </p:spTree>
     <p:extLst>
       <p:ext uri="{BB962C8B-B14F-4D97-AF65-F5344CB8AC3E}">
-        <p14:creationId xmlns:p14="http://schemas.microsoft.com/office/powerpoint/2010/main" val="4078783751"/>
+        <p14:creationId xmlns:p14="http://schemas.microsoft.com/office/powerpoint/2010/main" val="2646206206"/>
       </p:ext>
     </p:extLst>
   </p:cSld>
@@ -1202,7 +1202,7 @@
 
 <file path=ppt/slideLayouts/slideLayout3.xml><?xml version="1.0" encoding="utf-8"?>
 <p:sldLayout xmlns:a="http://schemas.openxmlformats.org/drawingml/2006/main" xmlns:r="http://schemas.openxmlformats.org/officeDocument/2006/relationships" xmlns:p="http://schemas.openxmlformats.org/presentationml/2006/main" type="secHead" preserve="1">
-  <p:cSld name="Encabezado de sección">
+  <p:cSld name="Section Header">
     <p:spTree>
       <p:nvGrpSpPr>
         <p:cNvPr id="1" name=""/>
@@ -1229,21 +1229,21 @@
         </p:nvSpPr>
         <p:spPr>
           <a:xfrm>
-            <a:off x="831850" y="1709738"/>
-            <a:ext cx="10515600" cy="2852737"/>
+            <a:off x="831850" y="820833"/>
+            <a:ext cx="10515600" cy="1369578"/>
           </a:xfrm>
         </p:spPr>
         <p:txBody>
           <a:bodyPr anchor="b"/>
           <a:lstStyle>
             <a:lvl1pPr>
-              <a:defRPr sz="6000"/>
+              <a:defRPr sz="2881"/>
             </a:lvl1pPr>
           </a:lstStyle>
           <a:p>
             <a:r>
-              <a:rPr lang="es-ES"/>
-              <a:t>Haga clic para modificar el estilo de título del patrón</a:t>
+              <a:rPr lang="en-US"/>
+              <a:t>Click to edit Master title style</a:t>
             </a:r>
             <a:endParaRPr lang="en-US" dirty="0"/>
           </a:p>
@@ -1261,8 +1261,8 @@
         </p:nvSpPr>
         <p:spPr>
           <a:xfrm>
-            <a:off x="831850" y="4589463"/>
-            <a:ext cx="10515600" cy="1500187"/>
+            <a:off x="831850" y="2203367"/>
+            <a:ext cx="10515600" cy="720229"/>
           </a:xfrm>
         </p:spPr>
         <p:txBody>
@@ -1270,7 +1270,7 @@
           <a:lstStyle>
             <a:lvl1pPr marL="0" indent="0">
               <a:buNone/>
-              <a:defRPr sz="2400">
+              <a:defRPr sz="1152">
                 <a:solidFill>
                   <a:schemeClr val="tx1">
                     <a:tint val="75000"/>
@@ -1278,9 +1278,9 @@
                 </a:solidFill>
               </a:defRPr>
             </a:lvl1pPr>
-            <a:lvl2pPr marL="457200" indent="0">
-              <a:buNone/>
-              <a:defRPr sz="2000">
+            <a:lvl2pPr marL="219502" indent="0">
+              <a:buNone/>
+              <a:defRPr sz="960">
                 <a:solidFill>
                   <a:schemeClr val="tx1">
                     <a:tint val="75000"/>
@@ -1288,9 +1288,9 @@
                 </a:solidFill>
               </a:defRPr>
             </a:lvl2pPr>
-            <a:lvl3pPr marL="914400" indent="0">
-              <a:buNone/>
-              <a:defRPr sz="1800">
+            <a:lvl3pPr marL="439003" indent="0">
+              <a:buNone/>
+              <a:defRPr sz="864">
                 <a:solidFill>
                   <a:schemeClr val="tx1">
                     <a:tint val="75000"/>
@@ -1298,9 +1298,9 @@
                 </a:solidFill>
               </a:defRPr>
             </a:lvl3pPr>
-            <a:lvl4pPr marL="1371600" indent="0">
-              <a:buNone/>
-              <a:defRPr sz="1600">
+            <a:lvl4pPr marL="658505" indent="0">
+              <a:buNone/>
+              <a:defRPr sz="768">
                 <a:solidFill>
                   <a:schemeClr val="tx1">
                     <a:tint val="75000"/>
@@ -1308,9 +1308,9 @@
                 </a:solidFill>
               </a:defRPr>
             </a:lvl4pPr>
-            <a:lvl5pPr marL="1828800" indent="0">
-              <a:buNone/>
-              <a:defRPr sz="1600">
+            <a:lvl5pPr marL="878007" indent="0">
+              <a:buNone/>
+              <a:defRPr sz="768">
                 <a:solidFill>
                   <a:schemeClr val="tx1">
                     <a:tint val="75000"/>
@@ -1318,9 +1318,9 @@
                 </a:solidFill>
               </a:defRPr>
             </a:lvl5pPr>
-            <a:lvl6pPr marL="2286000" indent="0">
-              <a:buNone/>
-              <a:defRPr sz="1600">
+            <a:lvl6pPr marL="1097509" indent="0">
+              <a:buNone/>
+              <a:defRPr sz="768">
                 <a:solidFill>
                   <a:schemeClr val="tx1">
                     <a:tint val="75000"/>
@@ -1328,9 +1328,9 @@
                 </a:solidFill>
               </a:defRPr>
             </a:lvl6pPr>
-            <a:lvl7pPr marL="2743200" indent="0">
-              <a:buNone/>
-              <a:defRPr sz="1600">
+            <a:lvl7pPr marL="1317010" indent="0">
+              <a:buNone/>
+              <a:defRPr sz="768">
                 <a:solidFill>
                   <a:schemeClr val="tx1">
                     <a:tint val="75000"/>
@@ -1338,9 +1338,9 @@
                 </a:solidFill>
               </a:defRPr>
             </a:lvl7pPr>
-            <a:lvl8pPr marL="3200400" indent="0">
-              <a:buNone/>
-              <a:defRPr sz="1600">
+            <a:lvl8pPr marL="1536512" indent="0">
+              <a:buNone/>
+              <a:defRPr sz="768">
                 <a:solidFill>
                   <a:schemeClr val="tx1">
                     <a:tint val="75000"/>
@@ -1348,9 +1348,9 @@
                 </a:solidFill>
               </a:defRPr>
             </a:lvl8pPr>
-            <a:lvl9pPr marL="3657600" indent="0">
-              <a:buNone/>
-              <a:defRPr sz="1600">
+            <a:lvl9pPr marL="1756014" indent="0">
+              <a:buNone/>
+              <a:defRPr sz="768">
                 <a:solidFill>
                   <a:schemeClr val="tx1">
                     <a:tint val="75000"/>
@@ -1362,8 +1362,8 @@
           <a:p>
             <a:pPr lvl="0"/>
             <a:r>
-              <a:rPr lang="es-ES"/>
-              <a:t>Haga clic para modificar los estilos de texto del patrón</a:t>
+              <a:rPr lang="en-US"/>
+              <a:t>Click to edit Master text styles</a:t>
             </a:r>
           </a:p>
         </p:txBody>
@@ -1436,7 +1436,7 @@
     </p:spTree>
     <p:extLst>
       <p:ext uri="{BB962C8B-B14F-4D97-AF65-F5344CB8AC3E}">
-        <p14:creationId xmlns:p14="http://schemas.microsoft.com/office/powerpoint/2010/main" val="2925356699"/>
+        <p14:creationId xmlns:p14="http://schemas.microsoft.com/office/powerpoint/2010/main" val="388463900"/>
       </p:ext>
     </p:extLst>
   </p:cSld>
@@ -1448,7 +1448,7 @@
 
 <file path=ppt/slideLayouts/slideLayout4.xml><?xml version="1.0" encoding="utf-8"?>
 <p:sldLayout xmlns:a="http://schemas.openxmlformats.org/drawingml/2006/main" xmlns:r="http://schemas.openxmlformats.org/officeDocument/2006/relationships" xmlns:p="http://schemas.openxmlformats.org/presentationml/2006/main" type="twoObj" preserve="1">
-  <p:cSld name="Dos objetos">
+  <p:cSld name="Two Content">
     <p:spTree>
       <p:nvGrpSpPr>
         <p:cNvPr id="1" name=""/>
@@ -1479,8 +1479,8 @@
           <a:lstStyle/>
           <a:p>
             <a:r>
-              <a:rPr lang="es-ES"/>
-              <a:t>Haga clic para modificar el estilo de título del patrón</a:t>
+              <a:rPr lang="en-US"/>
+              <a:t>Click to edit Master title style</a:t>
             </a:r>
             <a:endParaRPr lang="en-US" dirty="0"/>
           </a:p>
@@ -1498,8 +1498,8 @@
         </p:nvSpPr>
         <p:spPr>
           <a:xfrm>
-            <a:off x="838200" y="1825625"/>
-            <a:ext cx="5181600" cy="4351338"/>
+            <a:off x="838200" y="876469"/>
+            <a:ext cx="5181600" cy="2089045"/>
           </a:xfrm>
         </p:spPr>
         <p:txBody>
@@ -1508,36 +1508,36 @@
           <a:p>
             <a:pPr lvl="0"/>
             <a:r>
-              <a:rPr lang="es-ES"/>
-              <a:t>Haga clic para modificar los estilos de texto del patrón</a:t>
+              <a:rPr lang="en-US"/>
+              <a:t>Click to edit Master text styles</a:t>
             </a:r>
           </a:p>
           <a:p>
             <a:pPr lvl="1"/>
             <a:r>
-              <a:rPr lang="es-ES"/>
-              <a:t>Segundo nivel</a:t>
+              <a:rPr lang="en-US"/>
+              <a:t>Second level</a:t>
             </a:r>
           </a:p>
           <a:p>
             <a:pPr lvl="2"/>
             <a:r>
-              <a:rPr lang="es-ES"/>
-              <a:t>Tercer nivel</a:t>
+              <a:rPr lang="en-US"/>
+              <a:t>Third level</a:t>
             </a:r>
           </a:p>
           <a:p>
             <a:pPr lvl="3"/>
             <a:r>
-              <a:rPr lang="es-ES"/>
-              <a:t>Cuarto nivel</a:t>
+              <a:rPr lang="en-US"/>
+              <a:t>Fourth level</a:t>
             </a:r>
           </a:p>
           <a:p>
             <a:pPr lvl="4"/>
             <a:r>
-              <a:rPr lang="es-ES"/>
-              <a:t>Quinto nivel</a:t>
+              <a:rPr lang="en-US"/>
+              <a:t>Fifth level</a:t>
             </a:r>
             <a:endParaRPr lang="en-US" dirty="0"/>
           </a:p>
@@ -1555,8 +1555,8 @@
         </p:nvSpPr>
         <p:spPr>
           <a:xfrm>
-            <a:off x="6172200" y="1825625"/>
-            <a:ext cx="5181600" cy="4351338"/>
+            <a:off x="6172200" y="876469"/>
+            <a:ext cx="5181600" cy="2089045"/>
           </a:xfrm>
         </p:spPr>
         <p:txBody>
@@ -1565,36 +1565,36 @@
           <a:p>
             <a:pPr lvl="0"/>
             <a:r>
-              <a:rPr lang="es-ES"/>
-              <a:t>Haga clic para modificar los estilos de texto del patrón</a:t>
+              <a:rPr lang="en-US"/>
+              <a:t>Click to edit Master text styles</a:t>
             </a:r>
           </a:p>
           <a:p>
             <a:pPr lvl="1"/>
             <a:r>
-              <a:rPr lang="es-ES"/>
-              <a:t>Segundo nivel</a:t>
+              <a:rPr lang="en-US"/>
+              <a:t>Second level</a:t>
             </a:r>
           </a:p>
           <a:p>
             <a:pPr lvl="2"/>
             <a:r>
-              <a:rPr lang="es-ES"/>
-              <a:t>Tercer nivel</a:t>
+              <a:rPr lang="en-US"/>
+              <a:t>Third level</a:t>
             </a:r>
           </a:p>
           <a:p>
             <a:pPr lvl="3"/>
             <a:r>
-              <a:rPr lang="es-ES"/>
-              <a:t>Cuarto nivel</a:t>
+              <a:rPr lang="en-US"/>
+              <a:t>Fourth level</a:t>
             </a:r>
           </a:p>
           <a:p>
             <a:pPr lvl="4"/>
             <a:r>
-              <a:rPr lang="es-ES"/>
-              <a:t>Quinto nivel</a:t>
+              <a:rPr lang="en-US"/>
+              <a:t>Fifth level</a:t>
             </a:r>
             <a:endParaRPr lang="en-US" dirty="0"/>
           </a:p>
@@ -1668,7 +1668,7 @@
     </p:spTree>
     <p:extLst>
       <p:ext uri="{BB962C8B-B14F-4D97-AF65-F5344CB8AC3E}">
-        <p14:creationId xmlns:p14="http://schemas.microsoft.com/office/powerpoint/2010/main" val="4097879612"/>
+        <p14:creationId xmlns:p14="http://schemas.microsoft.com/office/powerpoint/2010/main" val="4106280100"/>
       </p:ext>
     </p:extLst>
   </p:cSld>
@@ -1680,7 +1680,7 @@
 
 <file path=ppt/slideLayouts/slideLayout5.xml><?xml version="1.0" encoding="utf-8"?>
 <p:sldLayout xmlns:a="http://schemas.openxmlformats.org/drawingml/2006/main" xmlns:r="http://schemas.openxmlformats.org/officeDocument/2006/relationships" xmlns:p="http://schemas.openxmlformats.org/presentationml/2006/main" type="twoTxTwoObj" preserve="1">
-  <p:cSld name="Comparación">
+  <p:cSld name="Comparison">
     <p:spTree>
       <p:nvGrpSpPr>
         <p:cNvPr id="1" name=""/>
@@ -1707,8 +1707,8 @@
         </p:nvSpPr>
         <p:spPr>
           <a:xfrm>
-            <a:off x="839788" y="365125"/>
-            <a:ext cx="10515600" cy="1325563"/>
+            <a:off x="839788" y="175294"/>
+            <a:ext cx="10515600" cy="636393"/>
           </a:xfrm>
         </p:spPr>
         <p:txBody>
@@ -1716,8 +1716,8 @@
           <a:lstStyle/>
           <a:p>
             <a:r>
-              <a:rPr lang="es-ES"/>
-              <a:t>Haga clic para modificar el estilo de título del patrón</a:t>
+              <a:rPr lang="en-US"/>
+              <a:t>Click to edit Master title style</a:t>
             </a:r>
             <a:endParaRPr lang="en-US" dirty="0"/>
           </a:p>
@@ -1735,8 +1735,8 @@
         </p:nvSpPr>
         <p:spPr>
           <a:xfrm>
-            <a:off x="839788" y="1681163"/>
-            <a:ext cx="5157787" cy="823912"/>
+            <a:off x="839789" y="807114"/>
+            <a:ext cx="5157787" cy="395554"/>
           </a:xfrm>
         </p:spPr>
         <p:txBody>
@@ -1744,46 +1744,46 @@
           <a:lstStyle>
             <a:lvl1pPr marL="0" indent="0">
               <a:buNone/>
-              <a:defRPr sz="2400" b="1"/>
+              <a:defRPr sz="1152" b="1"/>
             </a:lvl1pPr>
-            <a:lvl2pPr marL="457200" indent="0">
-              <a:buNone/>
-              <a:defRPr sz="2000" b="1"/>
+            <a:lvl2pPr marL="219502" indent="0">
+              <a:buNone/>
+              <a:defRPr sz="960" b="1"/>
             </a:lvl2pPr>
-            <a:lvl3pPr marL="914400" indent="0">
-              <a:buNone/>
-              <a:defRPr sz="1800" b="1"/>
+            <a:lvl3pPr marL="439003" indent="0">
+              <a:buNone/>
+              <a:defRPr sz="864" b="1"/>
             </a:lvl3pPr>
-            <a:lvl4pPr marL="1371600" indent="0">
-              <a:buNone/>
-              <a:defRPr sz="1600" b="1"/>
+            <a:lvl4pPr marL="658505" indent="0">
+              <a:buNone/>
+              <a:defRPr sz="768" b="1"/>
             </a:lvl4pPr>
-            <a:lvl5pPr marL="1828800" indent="0">
-              <a:buNone/>
-              <a:defRPr sz="1600" b="1"/>
+            <a:lvl5pPr marL="878007" indent="0">
+              <a:buNone/>
+              <a:defRPr sz="768" b="1"/>
             </a:lvl5pPr>
-            <a:lvl6pPr marL="2286000" indent="0">
-              <a:buNone/>
-              <a:defRPr sz="1600" b="1"/>
+            <a:lvl6pPr marL="1097509" indent="0">
+              <a:buNone/>
+              <a:defRPr sz="768" b="1"/>
             </a:lvl6pPr>
-            <a:lvl7pPr marL="2743200" indent="0">
-              <a:buNone/>
-              <a:defRPr sz="1600" b="1"/>
+            <a:lvl7pPr marL="1317010" indent="0">
+              <a:buNone/>
+              <a:defRPr sz="768" b="1"/>
             </a:lvl7pPr>
-            <a:lvl8pPr marL="3200400" indent="0">
-              <a:buNone/>
-              <a:defRPr sz="1600" b="1"/>
+            <a:lvl8pPr marL="1536512" indent="0">
+              <a:buNone/>
+              <a:defRPr sz="768" b="1"/>
             </a:lvl8pPr>
-            <a:lvl9pPr marL="3657600" indent="0">
-              <a:buNone/>
-              <a:defRPr sz="1600" b="1"/>
+            <a:lvl9pPr marL="1756014" indent="0">
+              <a:buNone/>
+              <a:defRPr sz="768" b="1"/>
             </a:lvl9pPr>
           </a:lstStyle>
           <a:p>
             <a:pPr lvl="0"/>
             <a:r>
-              <a:rPr lang="es-ES"/>
-              <a:t>Haga clic para modificar los estilos de texto del patrón</a:t>
+              <a:rPr lang="en-US"/>
+              <a:t>Click to edit Master text styles</a:t>
             </a:r>
           </a:p>
         </p:txBody>
@@ -1800,8 +1800,8 @@
         </p:nvSpPr>
         <p:spPr>
           <a:xfrm>
-            <a:off x="839788" y="2505075"/>
-            <a:ext cx="5157787" cy="3684588"/>
+            <a:off x="839789" y="1202668"/>
+            <a:ext cx="5157787" cy="1768943"/>
           </a:xfrm>
         </p:spPr>
         <p:txBody>
@@ -1810,36 +1810,36 @@
           <a:p>
             <a:pPr lvl="0"/>
             <a:r>
-              <a:rPr lang="es-ES"/>
-              <a:t>Haga clic para modificar los estilos de texto del patrón</a:t>
+              <a:rPr lang="en-US"/>
+              <a:t>Click to edit Master text styles</a:t>
             </a:r>
           </a:p>
           <a:p>
             <a:pPr lvl="1"/>
             <a:r>
-              <a:rPr lang="es-ES"/>
-              <a:t>Segundo nivel</a:t>
+              <a:rPr lang="en-US"/>
+              <a:t>Second level</a:t>
             </a:r>
           </a:p>
           <a:p>
             <a:pPr lvl="2"/>
             <a:r>
-              <a:rPr lang="es-ES"/>
-              <a:t>Tercer nivel</a:t>
+              <a:rPr lang="en-US"/>
+              <a:t>Third level</a:t>
             </a:r>
           </a:p>
           <a:p>
             <a:pPr lvl="3"/>
             <a:r>
-              <a:rPr lang="es-ES"/>
-              <a:t>Cuarto nivel</a:t>
+              <a:rPr lang="en-US"/>
+              <a:t>Fourth level</a:t>
             </a:r>
           </a:p>
           <a:p>
             <a:pPr lvl="4"/>
             <a:r>
-              <a:rPr lang="es-ES"/>
-              <a:t>Quinto nivel</a:t>
+              <a:rPr lang="en-US"/>
+              <a:t>Fifth level</a:t>
             </a:r>
             <a:endParaRPr lang="en-US" dirty="0"/>
           </a:p>
@@ -1857,8 +1857,8 @@
         </p:nvSpPr>
         <p:spPr>
           <a:xfrm>
-            <a:off x="6172200" y="1681163"/>
-            <a:ext cx="5183188" cy="823912"/>
+            <a:off x="6172200" y="807114"/>
+            <a:ext cx="5183188" cy="395554"/>
           </a:xfrm>
         </p:spPr>
         <p:txBody>
@@ -1866,46 +1866,46 @@
           <a:lstStyle>
             <a:lvl1pPr marL="0" indent="0">
               <a:buNone/>
-              <a:defRPr sz="2400" b="1"/>
+              <a:defRPr sz="1152" b="1"/>
             </a:lvl1pPr>
-            <a:lvl2pPr marL="457200" indent="0">
-              <a:buNone/>
-              <a:defRPr sz="2000" b="1"/>
+            <a:lvl2pPr marL="219502" indent="0">
+              <a:buNone/>
+              <a:defRPr sz="960" b="1"/>
             </a:lvl2pPr>
-            <a:lvl3pPr marL="914400" indent="0">
-              <a:buNone/>
-              <a:defRPr sz="1800" b="1"/>
+            <a:lvl3pPr marL="439003" indent="0">
+              <a:buNone/>
+              <a:defRPr sz="864" b="1"/>
             </a:lvl3pPr>
-            <a:lvl4pPr marL="1371600" indent="0">
-              <a:buNone/>
-              <a:defRPr sz="1600" b="1"/>
+            <a:lvl4pPr marL="658505" indent="0">
+              <a:buNone/>
+              <a:defRPr sz="768" b="1"/>
             </a:lvl4pPr>
-            <a:lvl5pPr marL="1828800" indent="0">
-              <a:buNone/>
-              <a:defRPr sz="1600" b="1"/>
+            <a:lvl5pPr marL="878007" indent="0">
+              <a:buNone/>
+              <a:defRPr sz="768" b="1"/>
             </a:lvl5pPr>
-            <a:lvl6pPr marL="2286000" indent="0">
-              <a:buNone/>
-              <a:defRPr sz="1600" b="1"/>
+            <a:lvl6pPr marL="1097509" indent="0">
+              <a:buNone/>
+              <a:defRPr sz="768" b="1"/>
             </a:lvl6pPr>
-            <a:lvl7pPr marL="2743200" indent="0">
-              <a:buNone/>
-              <a:defRPr sz="1600" b="1"/>
+            <a:lvl7pPr marL="1317010" indent="0">
+              <a:buNone/>
+              <a:defRPr sz="768" b="1"/>
             </a:lvl7pPr>
-            <a:lvl8pPr marL="3200400" indent="0">
-              <a:buNone/>
-              <a:defRPr sz="1600" b="1"/>
+            <a:lvl8pPr marL="1536512" indent="0">
+              <a:buNone/>
+              <a:defRPr sz="768" b="1"/>
             </a:lvl8pPr>
-            <a:lvl9pPr marL="3657600" indent="0">
-              <a:buNone/>
-              <a:defRPr sz="1600" b="1"/>
+            <a:lvl9pPr marL="1756014" indent="0">
+              <a:buNone/>
+              <a:defRPr sz="768" b="1"/>
             </a:lvl9pPr>
           </a:lstStyle>
           <a:p>
             <a:pPr lvl="0"/>
             <a:r>
-              <a:rPr lang="es-ES"/>
-              <a:t>Haga clic para modificar los estilos de texto del patrón</a:t>
+              <a:rPr lang="en-US"/>
+              <a:t>Click to edit Master text styles</a:t>
             </a:r>
           </a:p>
         </p:txBody>
@@ -1922,8 +1922,8 @@
         </p:nvSpPr>
         <p:spPr>
           <a:xfrm>
-            <a:off x="6172200" y="2505075"/>
-            <a:ext cx="5183188" cy="3684588"/>
+            <a:off x="6172200" y="1202668"/>
+            <a:ext cx="5183188" cy="1768943"/>
           </a:xfrm>
         </p:spPr>
         <p:txBody>
@@ -1932,36 +1932,36 @@
           <a:p>
             <a:pPr lvl="0"/>
             <a:r>
-              <a:rPr lang="es-ES"/>
-              <a:t>Haga clic para modificar los estilos de texto del patrón</a:t>
+              <a:rPr lang="en-US"/>
+              <a:t>Click to edit Master text styles</a:t>
             </a:r>
           </a:p>
           <a:p>
             <a:pPr lvl="1"/>
             <a:r>
-              <a:rPr lang="es-ES"/>
-              <a:t>Segundo nivel</a:t>
+              <a:rPr lang="en-US"/>
+              <a:t>Second level</a:t>
             </a:r>
           </a:p>
           <a:p>
             <a:pPr lvl="2"/>
             <a:r>
-              <a:rPr lang="es-ES"/>
-              <a:t>Tercer nivel</a:t>
+              <a:rPr lang="en-US"/>
+              <a:t>Third level</a:t>
             </a:r>
           </a:p>
           <a:p>
             <a:pPr lvl="3"/>
             <a:r>
-              <a:rPr lang="es-ES"/>
-              <a:t>Cuarto nivel</a:t>
+              <a:rPr lang="en-US"/>
+              <a:t>Fourth level</a:t>
             </a:r>
           </a:p>
           <a:p>
             <a:pPr lvl="4"/>
             <a:r>
-              <a:rPr lang="es-ES"/>
-              <a:t>Quinto nivel</a:t>
+              <a:rPr lang="en-US"/>
+              <a:t>Fifth level</a:t>
             </a:r>
             <a:endParaRPr lang="en-US" dirty="0"/>
           </a:p>
@@ -2035,7 +2035,7 @@
     </p:spTree>
     <p:extLst>
       <p:ext uri="{BB962C8B-B14F-4D97-AF65-F5344CB8AC3E}">
-        <p14:creationId xmlns:p14="http://schemas.microsoft.com/office/powerpoint/2010/main" val="1686861052"/>
+        <p14:creationId xmlns:p14="http://schemas.microsoft.com/office/powerpoint/2010/main" val="1626454469"/>
       </p:ext>
     </p:extLst>
   </p:cSld>
@@ -2047,7 +2047,7 @@
 
 <file path=ppt/slideLayouts/slideLayout6.xml><?xml version="1.0" encoding="utf-8"?>
 <p:sldLayout xmlns:a="http://schemas.openxmlformats.org/drawingml/2006/main" xmlns:r="http://schemas.openxmlformats.org/officeDocument/2006/relationships" xmlns:p="http://schemas.openxmlformats.org/presentationml/2006/main" type="titleOnly" preserve="1">
-  <p:cSld name="Solo el título">
+  <p:cSld name="Title Only">
     <p:spTree>
       <p:nvGrpSpPr>
         <p:cNvPr id="1" name=""/>
@@ -2078,8 +2078,8 @@
           <a:lstStyle/>
           <a:p>
             <a:r>
-              <a:rPr lang="es-ES"/>
-              <a:t>Haga clic para modificar el estilo de título del patrón</a:t>
+              <a:rPr lang="en-US"/>
+              <a:t>Click to edit Master title style</a:t>
             </a:r>
             <a:endParaRPr lang="en-US" dirty="0"/>
           </a:p>
@@ -2153,7 +2153,7 @@
     </p:spTree>
     <p:extLst>
       <p:ext uri="{BB962C8B-B14F-4D97-AF65-F5344CB8AC3E}">
-        <p14:creationId xmlns:p14="http://schemas.microsoft.com/office/powerpoint/2010/main" val="1527854970"/>
+        <p14:creationId xmlns:p14="http://schemas.microsoft.com/office/powerpoint/2010/main" val="3433172169"/>
       </p:ext>
     </p:extLst>
   </p:cSld>
@@ -2165,7 +2165,7 @@
 
 <file path=ppt/slideLayouts/slideLayout7.xml><?xml version="1.0" encoding="utf-8"?>
 <p:sldLayout xmlns:a="http://schemas.openxmlformats.org/drawingml/2006/main" xmlns:r="http://schemas.openxmlformats.org/officeDocument/2006/relationships" xmlns:p="http://schemas.openxmlformats.org/presentationml/2006/main" type="blank" preserve="1">
-  <p:cSld name="En blanco">
+  <p:cSld name="Blank">
     <p:spTree>
       <p:nvGrpSpPr>
         <p:cNvPr id="1" name=""/>
@@ -2248,7 +2248,7 @@
     </p:spTree>
     <p:extLst>
       <p:ext uri="{BB962C8B-B14F-4D97-AF65-F5344CB8AC3E}">
-        <p14:creationId xmlns:p14="http://schemas.microsoft.com/office/powerpoint/2010/main" val="1570386481"/>
+        <p14:creationId xmlns:p14="http://schemas.microsoft.com/office/powerpoint/2010/main" val="1809577454"/>
       </p:ext>
     </p:extLst>
   </p:cSld>
@@ -2260,7 +2260,7 @@
 
 <file path=ppt/slideLayouts/slideLayout8.xml><?xml version="1.0" encoding="utf-8"?>
 <p:sldLayout xmlns:a="http://schemas.openxmlformats.org/drawingml/2006/main" xmlns:r="http://schemas.openxmlformats.org/officeDocument/2006/relationships" xmlns:p="http://schemas.openxmlformats.org/presentationml/2006/main" type="objTx" preserve="1">
-  <p:cSld name="Contenido con título">
+  <p:cSld name="Content with Caption">
     <p:spTree>
       <p:nvGrpSpPr>
         <p:cNvPr id="1" name=""/>
@@ -2287,21 +2287,21 @@
         </p:nvSpPr>
         <p:spPr>
           <a:xfrm>
-            <a:off x="839788" y="457200"/>
-            <a:ext cx="3932237" cy="1600200"/>
+            <a:off x="839789" y="219498"/>
+            <a:ext cx="3932237" cy="768244"/>
           </a:xfrm>
         </p:spPr>
         <p:txBody>
           <a:bodyPr anchor="b"/>
           <a:lstStyle>
             <a:lvl1pPr>
-              <a:defRPr sz="3200"/>
+              <a:defRPr sz="1536"/>
             </a:lvl1pPr>
           </a:lstStyle>
           <a:p>
             <a:r>
-              <a:rPr lang="es-ES"/>
-              <a:t>Haga clic para modificar el estilo de título del patrón</a:t>
+              <a:rPr lang="en-US"/>
+              <a:t>Click to edit Master title style</a:t>
             </a:r>
             <a:endParaRPr lang="en-US" dirty="0"/>
           </a:p>
@@ -2319,74 +2319,74 @@
         </p:nvSpPr>
         <p:spPr>
           <a:xfrm>
-            <a:off x="5183188" y="987425"/>
-            <a:ext cx="6172200" cy="4873625"/>
+            <a:off x="5183188" y="474056"/>
+            <a:ext cx="6172200" cy="2339791"/>
           </a:xfrm>
         </p:spPr>
         <p:txBody>
           <a:bodyPr/>
           <a:lstStyle>
             <a:lvl1pPr>
-              <a:defRPr sz="3200"/>
+              <a:defRPr sz="1536"/>
             </a:lvl1pPr>
             <a:lvl2pPr>
-              <a:defRPr sz="2800"/>
+              <a:defRPr sz="1344"/>
             </a:lvl2pPr>
             <a:lvl3pPr>
-              <a:defRPr sz="2400"/>
+              <a:defRPr sz="1152"/>
             </a:lvl3pPr>
             <a:lvl4pPr>
-              <a:defRPr sz="2000"/>
+              <a:defRPr sz="960"/>
             </a:lvl4pPr>
             <a:lvl5pPr>
-              <a:defRPr sz="2000"/>
+              <a:defRPr sz="960"/>
             </a:lvl5pPr>
             <a:lvl6pPr>
-              <a:defRPr sz="2000"/>
+              <a:defRPr sz="960"/>
             </a:lvl6pPr>
             <a:lvl7pPr>
-              <a:defRPr sz="2000"/>
+              <a:defRPr sz="960"/>
             </a:lvl7pPr>
             <a:lvl8pPr>
-              <a:defRPr sz="2000"/>
+              <a:defRPr sz="960"/>
             </a:lvl8pPr>
             <a:lvl9pPr>
-              <a:defRPr sz="2000"/>
+              <a:defRPr sz="960"/>
             </a:lvl9pPr>
           </a:lstStyle>
           <a:p>
             <a:pPr lvl="0"/>
             <a:r>
-              <a:rPr lang="es-ES"/>
-              <a:t>Haga clic para modificar los estilos de texto del patrón</a:t>
+              <a:rPr lang="en-US"/>
+              <a:t>Click to edit Master text styles</a:t>
             </a:r>
           </a:p>
           <a:p>
             <a:pPr lvl="1"/>
             <a:r>
-              <a:rPr lang="es-ES"/>
-              <a:t>Segundo nivel</a:t>
+              <a:rPr lang="en-US"/>
+              <a:t>Second level</a:t>
             </a:r>
           </a:p>
           <a:p>
             <a:pPr lvl="2"/>
             <a:r>
-              <a:rPr lang="es-ES"/>
-              <a:t>Tercer nivel</a:t>
+              <a:rPr lang="en-US"/>
+              <a:t>Third level</a:t>
             </a:r>
           </a:p>
           <a:p>
             <a:pPr lvl="3"/>
             <a:r>
-              <a:rPr lang="es-ES"/>
-              <a:t>Cuarto nivel</a:t>
+              <a:rPr lang="en-US"/>
+              <a:t>Fourth level</a:t>
             </a:r>
           </a:p>
           <a:p>
             <a:pPr lvl="4"/>
             <a:r>
-              <a:rPr lang="es-ES"/>
-              <a:t>Quinto nivel</a:t>
+              <a:rPr lang="en-US"/>
+              <a:t>Fifth level</a:t>
             </a:r>
             <a:endParaRPr lang="en-US" dirty="0"/>
           </a:p>
@@ -2404,8 +2404,8 @@
         </p:nvSpPr>
         <p:spPr>
           <a:xfrm>
-            <a:off x="839788" y="2057400"/>
-            <a:ext cx="3932237" cy="3811588"/>
+            <a:off x="839789" y="987743"/>
+            <a:ext cx="3932237" cy="1829915"/>
           </a:xfrm>
         </p:spPr>
         <p:txBody>
@@ -2413,46 +2413,46 @@
           <a:lstStyle>
             <a:lvl1pPr marL="0" indent="0">
               <a:buNone/>
-              <a:defRPr sz="1600"/>
+              <a:defRPr sz="768"/>
             </a:lvl1pPr>
-            <a:lvl2pPr marL="457200" indent="0">
-              <a:buNone/>
-              <a:defRPr sz="1400"/>
+            <a:lvl2pPr marL="219502" indent="0">
+              <a:buNone/>
+              <a:defRPr sz="672"/>
             </a:lvl2pPr>
-            <a:lvl3pPr marL="914400" indent="0">
-              <a:buNone/>
-              <a:defRPr sz="1200"/>
+            <a:lvl3pPr marL="439003" indent="0">
+              <a:buNone/>
+              <a:defRPr sz="576"/>
             </a:lvl3pPr>
-            <a:lvl4pPr marL="1371600" indent="0">
-              <a:buNone/>
-              <a:defRPr sz="1000"/>
+            <a:lvl4pPr marL="658505" indent="0">
+              <a:buNone/>
+              <a:defRPr sz="480"/>
             </a:lvl4pPr>
-            <a:lvl5pPr marL="1828800" indent="0">
-              <a:buNone/>
-              <a:defRPr sz="1000"/>
+            <a:lvl5pPr marL="878007" indent="0">
+              <a:buNone/>
+              <a:defRPr sz="480"/>
             </a:lvl5pPr>
-            <a:lvl6pPr marL="2286000" indent="0">
-              <a:buNone/>
-              <a:defRPr sz="1000"/>
+            <a:lvl6pPr marL="1097509" indent="0">
+              <a:buNone/>
+              <a:defRPr sz="480"/>
             </a:lvl6pPr>
-            <a:lvl7pPr marL="2743200" indent="0">
-              <a:buNone/>
-              <a:defRPr sz="1000"/>
+            <a:lvl7pPr marL="1317010" indent="0">
+              <a:buNone/>
+              <a:defRPr sz="480"/>
             </a:lvl7pPr>
-            <a:lvl8pPr marL="3200400" indent="0">
-              <a:buNone/>
-              <a:defRPr sz="1000"/>
+            <a:lvl8pPr marL="1536512" indent="0">
+              <a:buNone/>
+              <a:defRPr sz="480"/>
             </a:lvl8pPr>
-            <a:lvl9pPr marL="3657600" indent="0">
-              <a:buNone/>
-              <a:defRPr sz="1000"/>
+            <a:lvl9pPr marL="1756014" indent="0">
+              <a:buNone/>
+              <a:defRPr sz="480"/>
             </a:lvl9pPr>
           </a:lstStyle>
           <a:p>
             <a:pPr lvl="0"/>
             <a:r>
-              <a:rPr lang="es-ES"/>
-              <a:t>Haga clic para modificar los estilos de texto del patrón</a:t>
+              <a:rPr lang="en-US"/>
+              <a:t>Click to edit Master text styles</a:t>
             </a:r>
           </a:p>
         </p:txBody>
@@ -2525,7 +2525,7 @@
     </p:spTree>
     <p:extLst>
       <p:ext uri="{BB962C8B-B14F-4D97-AF65-F5344CB8AC3E}">
-        <p14:creationId xmlns:p14="http://schemas.microsoft.com/office/powerpoint/2010/main" val="2862997149"/>
+        <p14:creationId xmlns:p14="http://schemas.microsoft.com/office/powerpoint/2010/main" val="2417008527"/>
       </p:ext>
     </p:extLst>
   </p:cSld>
@@ -2537,7 +2537,7 @@
 
 <file path=ppt/slideLayouts/slideLayout9.xml><?xml version="1.0" encoding="utf-8"?>
 <p:sldLayout xmlns:a="http://schemas.openxmlformats.org/drawingml/2006/main" xmlns:r="http://schemas.openxmlformats.org/officeDocument/2006/relationships" xmlns:p="http://schemas.openxmlformats.org/presentationml/2006/main" type="picTx" preserve="1">
-  <p:cSld name="Imagen con título">
+  <p:cSld name="Picture with Caption">
     <p:spTree>
       <p:nvGrpSpPr>
         <p:cNvPr id="1" name=""/>
@@ -2564,21 +2564,21 @@
         </p:nvSpPr>
         <p:spPr>
           <a:xfrm>
-            <a:off x="839788" y="457200"/>
-            <a:ext cx="3932237" cy="1600200"/>
+            <a:off x="839789" y="219498"/>
+            <a:ext cx="3932237" cy="768244"/>
           </a:xfrm>
         </p:spPr>
         <p:txBody>
           <a:bodyPr anchor="b"/>
           <a:lstStyle>
             <a:lvl1pPr>
-              <a:defRPr sz="3200"/>
+              <a:defRPr sz="1536"/>
             </a:lvl1pPr>
           </a:lstStyle>
           <a:p>
             <a:r>
-              <a:rPr lang="es-ES"/>
-              <a:t>Haga clic para modificar el estilo de título del patrón</a:t>
+              <a:rPr lang="en-US"/>
+              <a:t>Click to edit Master title style</a:t>
             </a:r>
             <a:endParaRPr lang="en-US" dirty="0"/>
           </a:p>
@@ -2596,8 +2596,8 @@
         </p:nvSpPr>
         <p:spPr>
           <a:xfrm>
-            <a:off x="5183188" y="987425"/>
-            <a:ext cx="6172200" cy="4873625"/>
+            <a:off x="5183188" y="474056"/>
+            <a:ext cx="6172200" cy="2339791"/>
           </a:xfrm>
         </p:spPr>
         <p:txBody>
@@ -2605,45 +2605,45 @@
           <a:lstStyle>
             <a:lvl1pPr marL="0" indent="0">
               <a:buNone/>
-              <a:defRPr sz="3200"/>
+              <a:defRPr sz="1536"/>
             </a:lvl1pPr>
-            <a:lvl2pPr marL="457200" indent="0">
-              <a:buNone/>
-              <a:defRPr sz="2800"/>
+            <a:lvl2pPr marL="219502" indent="0">
+              <a:buNone/>
+              <a:defRPr sz="1344"/>
             </a:lvl2pPr>
-            <a:lvl3pPr marL="914400" indent="0">
-              <a:buNone/>
-              <a:defRPr sz="2400"/>
+            <a:lvl3pPr marL="439003" indent="0">
+              <a:buNone/>
+              <a:defRPr sz="1152"/>
             </a:lvl3pPr>
-            <a:lvl4pPr marL="1371600" indent="0">
-              <a:buNone/>
-              <a:defRPr sz="2000"/>
+            <a:lvl4pPr marL="658505" indent="0">
+              <a:buNone/>
+              <a:defRPr sz="960"/>
             </a:lvl4pPr>
-            <a:lvl5pPr marL="1828800" indent="0">
-              <a:buNone/>
-              <a:defRPr sz="2000"/>
+            <a:lvl5pPr marL="878007" indent="0">
+              <a:buNone/>
+              <a:defRPr sz="960"/>
             </a:lvl5pPr>
-            <a:lvl6pPr marL="2286000" indent="0">
-              <a:buNone/>
-              <a:defRPr sz="2000"/>
+            <a:lvl6pPr marL="1097509" indent="0">
+              <a:buNone/>
+              <a:defRPr sz="960"/>
             </a:lvl6pPr>
-            <a:lvl7pPr marL="2743200" indent="0">
-              <a:buNone/>
-              <a:defRPr sz="2000"/>
+            <a:lvl7pPr marL="1317010" indent="0">
+              <a:buNone/>
+              <a:defRPr sz="960"/>
             </a:lvl7pPr>
-            <a:lvl8pPr marL="3200400" indent="0">
-              <a:buNone/>
-              <a:defRPr sz="2000"/>
+            <a:lvl8pPr marL="1536512" indent="0">
+              <a:buNone/>
+              <a:defRPr sz="960"/>
             </a:lvl8pPr>
-            <a:lvl9pPr marL="3657600" indent="0">
-              <a:buNone/>
-              <a:defRPr sz="2000"/>
+            <a:lvl9pPr marL="1756014" indent="0">
+              <a:buNone/>
+              <a:defRPr sz="960"/>
             </a:lvl9pPr>
           </a:lstStyle>
           <a:p>
             <a:r>
-              <a:rPr lang="es-ES"/>
-              <a:t>Haga clic en el icono para agregar una imagen</a:t>
+              <a:rPr lang="en-US"/>
+              <a:t>Click icon to add picture</a:t>
             </a:r>
             <a:endParaRPr lang="en-US" dirty="0"/>
           </a:p>
@@ -2661,8 +2661,8 @@
         </p:nvSpPr>
         <p:spPr>
           <a:xfrm>
-            <a:off x="839788" y="2057400"/>
-            <a:ext cx="3932237" cy="3811588"/>
+            <a:off x="839789" y="987743"/>
+            <a:ext cx="3932237" cy="1829915"/>
           </a:xfrm>
         </p:spPr>
         <p:txBody>
@@ -2670,46 +2670,46 @@
           <a:lstStyle>
             <a:lvl1pPr marL="0" indent="0">
               <a:buNone/>
-              <a:defRPr sz="1600"/>
+              <a:defRPr sz="768"/>
             </a:lvl1pPr>
-            <a:lvl2pPr marL="457200" indent="0">
-              <a:buNone/>
-              <a:defRPr sz="1400"/>
+            <a:lvl2pPr marL="219502" indent="0">
+              <a:buNone/>
+              <a:defRPr sz="672"/>
             </a:lvl2pPr>
-            <a:lvl3pPr marL="914400" indent="0">
-              <a:buNone/>
-              <a:defRPr sz="1200"/>
+            <a:lvl3pPr marL="439003" indent="0">
+              <a:buNone/>
+              <a:defRPr sz="576"/>
             </a:lvl3pPr>
-            <a:lvl4pPr marL="1371600" indent="0">
-              <a:buNone/>
-              <a:defRPr sz="1000"/>
+            <a:lvl4pPr marL="658505" indent="0">
+              <a:buNone/>
+              <a:defRPr sz="480"/>
             </a:lvl4pPr>
-            <a:lvl5pPr marL="1828800" indent="0">
-              <a:buNone/>
-              <a:defRPr sz="1000"/>
+            <a:lvl5pPr marL="878007" indent="0">
+              <a:buNone/>
+              <a:defRPr sz="480"/>
             </a:lvl5pPr>
-            <a:lvl6pPr marL="2286000" indent="0">
-              <a:buNone/>
-              <a:defRPr sz="1000"/>
+            <a:lvl6pPr marL="1097509" indent="0">
+              <a:buNone/>
+              <a:defRPr sz="480"/>
             </a:lvl6pPr>
-            <a:lvl7pPr marL="2743200" indent="0">
-              <a:buNone/>
-              <a:defRPr sz="1000"/>
+            <a:lvl7pPr marL="1317010" indent="0">
+              <a:buNone/>
+              <a:defRPr sz="480"/>
             </a:lvl7pPr>
-            <a:lvl8pPr marL="3200400" indent="0">
-              <a:buNone/>
-              <a:defRPr sz="1000"/>
+            <a:lvl8pPr marL="1536512" indent="0">
+              <a:buNone/>
+              <a:defRPr sz="480"/>
             </a:lvl8pPr>
-            <a:lvl9pPr marL="3657600" indent="0">
-              <a:buNone/>
-              <a:defRPr sz="1000"/>
+            <a:lvl9pPr marL="1756014" indent="0">
+              <a:buNone/>
+              <a:defRPr sz="480"/>
             </a:lvl9pPr>
           </a:lstStyle>
           <a:p>
             <a:pPr lvl="0"/>
             <a:r>
-              <a:rPr lang="es-ES"/>
-              <a:t>Haga clic para modificar los estilos de texto del patrón</a:t>
+              <a:rPr lang="en-US"/>
+              <a:t>Click to edit Master text styles</a:t>
             </a:r>
           </a:p>
         </p:txBody>
@@ -2782,7 +2782,7 @@
     </p:spTree>
     <p:extLst>
       <p:ext uri="{BB962C8B-B14F-4D97-AF65-F5344CB8AC3E}">
-        <p14:creationId xmlns:p14="http://schemas.microsoft.com/office/powerpoint/2010/main" val="1838974521"/>
+        <p14:creationId xmlns:p14="http://schemas.microsoft.com/office/powerpoint/2010/main" val="4062153693"/>
       </p:ext>
     </p:extLst>
   </p:cSld>
@@ -2826,8 +2826,8 @@
         </p:nvSpPr>
         <p:spPr>
           <a:xfrm>
-            <a:off x="838200" y="365125"/>
-            <a:ext cx="10515600" cy="1325563"/>
+            <a:off x="838200" y="175294"/>
+            <a:ext cx="10515600" cy="636393"/>
           </a:xfrm>
           <a:prstGeom prst="rect">
             <a:avLst/>
@@ -2840,8 +2840,8 @@
           <a:lstStyle/>
           <a:p>
             <a:r>
-              <a:rPr lang="es-ES"/>
-              <a:t>Haga clic para modificar el estilo de título del patrón</a:t>
+              <a:rPr lang="en-US"/>
+              <a:t>Click to edit Master title style</a:t>
             </a:r>
             <a:endParaRPr lang="en-US" dirty="0"/>
           </a:p>
@@ -2859,8 +2859,8 @@
         </p:nvSpPr>
         <p:spPr>
           <a:xfrm>
-            <a:off x="838200" y="1825625"/>
-            <a:ext cx="10515600" cy="4351338"/>
+            <a:off x="838200" y="876469"/>
+            <a:ext cx="10515600" cy="2089045"/>
           </a:xfrm>
           <a:prstGeom prst="rect">
             <a:avLst/>
@@ -2874,36 +2874,36 @@
           <a:p>
             <a:pPr lvl="0"/>
             <a:r>
-              <a:rPr lang="es-ES"/>
-              <a:t>Haga clic para modificar los estilos de texto del patrón</a:t>
+              <a:rPr lang="en-US"/>
+              <a:t>Click to edit Master text styles</a:t>
             </a:r>
           </a:p>
           <a:p>
             <a:pPr lvl="1"/>
             <a:r>
-              <a:rPr lang="es-ES"/>
-              <a:t>Segundo nivel</a:t>
+              <a:rPr lang="en-US"/>
+              <a:t>Second level</a:t>
             </a:r>
           </a:p>
           <a:p>
             <a:pPr lvl="2"/>
             <a:r>
-              <a:rPr lang="es-ES"/>
-              <a:t>Tercer nivel</a:t>
+              <a:rPr lang="en-US"/>
+              <a:t>Third level</a:t>
             </a:r>
           </a:p>
           <a:p>
             <a:pPr lvl="3"/>
             <a:r>
-              <a:rPr lang="es-ES"/>
-              <a:t>Cuarto nivel</a:t>
+              <a:rPr lang="en-US"/>
+              <a:t>Fourth level</a:t>
             </a:r>
           </a:p>
           <a:p>
             <a:pPr lvl="4"/>
             <a:r>
-              <a:rPr lang="es-ES"/>
-              <a:t>Quinto nivel</a:t>
+              <a:rPr lang="en-US"/>
+              <a:t>Fifth level</a:t>
             </a:r>
             <a:endParaRPr lang="en-US" dirty="0"/>
           </a:p>
@@ -2921,8 +2921,8 @@
         </p:nvSpPr>
         <p:spPr>
           <a:xfrm>
-            <a:off x="838200" y="6356350"/>
-            <a:ext cx="2743200" cy="365125"/>
+            <a:off x="838200" y="3051637"/>
+            <a:ext cx="2743200" cy="175294"/>
           </a:xfrm>
           <a:prstGeom prst="rect">
             <a:avLst/>
@@ -2932,7 +2932,7 @@
           <a:bodyPr vert="horz" lIns="91440" tIns="45720" rIns="91440" bIns="45720" rtlCol="0" anchor="ctr"/>
           <a:lstStyle>
             <a:lvl1pPr algn="l">
-              <a:defRPr sz="1200">
+              <a:defRPr sz="576">
                 <a:solidFill>
                   <a:schemeClr val="tx1">
                     <a:tint val="75000"/>
@@ -2962,8 +2962,8 @@
         </p:nvSpPr>
         <p:spPr>
           <a:xfrm>
-            <a:off x="4038600" y="6356350"/>
-            <a:ext cx="4114800" cy="365125"/>
+            <a:off x="4038600" y="3051637"/>
+            <a:ext cx="4114800" cy="175294"/>
           </a:xfrm>
           <a:prstGeom prst="rect">
             <a:avLst/>
@@ -2973,7 +2973,7 @@
           <a:bodyPr vert="horz" lIns="91440" tIns="45720" rIns="91440" bIns="45720" rtlCol="0" anchor="ctr"/>
           <a:lstStyle>
             <a:lvl1pPr algn="ctr">
-              <a:defRPr sz="1200">
+              <a:defRPr sz="576">
                 <a:solidFill>
                   <a:schemeClr val="tx1">
                     <a:tint val="75000"/>
@@ -2999,8 +2999,8 @@
         </p:nvSpPr>
         <p:spPr>
           <a:xfrm>
-            <a:off x="8610600" y="6356350"/>
-            <a:ext cx="2743200" cy="365125"/>
+            <a:off x="8610600" y="3051637"/>
+            <a:ext cx="2743200" cy="175294"/>
           </a:xfrm>
           <a:prstGeom prst="rect">
             <a:avLst/>
@@ -3010,7 +3010,7 @@
           <a:bodyPr vert="horz" lIns="91440" tIns="45720" rIns="91440" bIns="45720" rtlCol="0" anchor="ctr"/>
           <a:lstStyle>
             <a:lvl1pPr algn="r">
-              <a:defRPr sz="1200">
+              <a:defRPr sz="576">
                 <a:solidFill>
                   <a:schemeClr val="tx1">
                     <a:tint val="75000"/>
@@ -3031,27 +3031,27 @@
     </p:spTree>
     <p:extLst>
       <p:ext uri="{BB962C8B-B14F-4D97-AF65-F5344CB8AC3E}">
-        <p14:creationId xmlns:p14="http://schemas.microsoft.com/office/powerpoint/2010/main" val="214956637"/>
+        <p14:creationId xmlns:p14="http://schemas.microsoft.com/office/powerpoint/2010/main" val="2656364933"/>
       </p:ext>
     </p:extLst>
   </p:cSld>
   <p:clrMap bg1="lt1" tx1="dk1" bg2="lt2" tx2="dk2" accent1="accent1" accent2="accent2" accent3="accent3" accent4="accent4" accent5="accent5" accent6="accent6" hlink="hlink" folHlink="folHlink"/>
   <p:sldLayoutIdLst>
-    <p:sldLayoutId id="2147483685" r:id="rId1"/>
-    <p:sldLayoutId id="2147483686" r:id="rId2"/>
-    <p:sldLayoutId id="2147483687" r:id="rId3"/>
-    <p:sldLayoutId id="2147483688" r:id="rId4"/>
-    <p:sldLayoutId id="2147483689" r:id="rId5"/>
-    <p:sldLayoutId id="2147483690" r:id="rId6"/>
-    <p:sldLayoutId id="2147483691" r:id="rId7"/>
-    <p:sldLayoutId id="2147483692" r:id="rId8"/>
-    <p:sldLayoutId id="2147483693" r:id="rId9"/>
-    <p:sldLayoutId id="2147483694" r:id="rId10"/>
-    <p:sldLayoutId id="2147483695" r:id="rId11"/>
+    <p:sldLayoutId id="2147483769" r:id="rId1"/>
+    <p:sldLayoutId id="2147483770" r:id="rId2"/>
+    <p:sldLayoutId id="2147483771" r:id="rId3"/>
+    <p:sldLayoutId id="2147483772" r:id="rId4"/>
+    <p:sldLayoutId id="2147483773" r:id="rId5"/>
+    <p:sldLayoutId id="2147483774" r:id="rId6"/>
+    <p:sldLayoutId id="2147483775" r:id="rId7"/>
+    <p:sldLayoutId id="2147483776" r:id="rId8"/>
+    <p:sldLayoutId id="2147483777" r:id="rId9"/>
+    <p:sldLayoutId id="2147483778" r:id="rId10"/>
+    <p:sldLayoutId id="2147483779" r:id="rId11"/>
   </p:sldLayoutIdLst>
   <p:txStyles>
     <p:titleStyle>
-      <a:lvl1pPr algn="l" defTabSz="914400" rtl="0" eaLnBrk="1" latinLnBrk="0" hangingPunct="1">
+      <a:lvl1pPr algn="l" defTabSz="439003" rtl="0" eaLnBrk="1" latinLnBrk="0" hangingPunct="1">
         <a:lnSpc>
           <a:spcPct val="90000"/>
         </a:lnSpc>
@@ -3059,7 +3059,7 @@
           <a:spcPct val="0"/>
         </a:spcBef>
         <a:buNone/>
-        <a:defRPr sz="4400" kern="1200">
+        <a:defRPr sz="2112" kern="1200">
           <a:solidFill>
             <a:schemeClr val="tx1"/>
           </a:solidFill>
@@ -3070,16 +3070,16 @@
       </a:lvl1pPr>
     </p:titleStyle>
     <p:bodyStyle>
-      <a:lvl1pPr marL="228600" indent="-228600" algn="l" defTabSz="914400" rtl="0" eaLnBrk="1" latinLnBrk="0" hangingPunct="1">
+      <a:lvl1pPr marL="109751" indent="-109751" algn="l" defTabSz="439003" rtl="0" eaLnBrk="1" latinLnBrk="0" hangingPunct="1">
         <a:lnSpc>
           <a:spcPct val="90000"/>
         </a:lnSpc>
         <a:spcBef>
-          <a:spcPts val="1000"/>
+          <a:spcPts val="480"/>
         </a:spcBef>
         <a:buFont typeface="Arial" panose="020B0604020202020204" pitchFamily="34" charset="0"/>
         <a:buChar char="•"/>
-        <a:defRPr sz="2800" kern="1200">
+        <a:defRPr sz="1344" kern="1200">
           <a:solidFill>
             <a:schemeClr val="tx1"/>
           </a:solidFill>
@@ -3088,16 +3088,16 @@
           <a:cs typeface="+mn-cs"/>
         </a:defRPr>
       </a:lvl1pPr>
-      <a:lvl2pPr marL="685800" indent="-228600" algn="l" defTabSz="914400" rtl="0" eaLnBrk="1" latinLnBrk="0" hangingPunct="1">
+      <a:lvl2pPr marL="329253" indent="-109751" algn="l" defTabSz="439003" rtl="0" eaLnBrk="1" latinLnBrk="0" hangingPunct="1">
         <a:lnSpc>
           <a:spcPct val="90000"/>
         </a:lnSpc>
         <a:spcBef>
-          <a:spcPts val="500"/>
+          <a:spcPts val="240"/>
         </a:spcBef>
         <a:buFont typeface="Arial" panose="020B0604020202020204" pitchFamily="34" charset="0"/>
         <a:buChar char="•"/>
-        <a:defRPr sz="2400" kern="1200">
+        <a:defRPr sz="1152" kern="1200">
           <a:solidFill>
             <a:schemeClr val="tx1"/>
           </a:solidFill>
@@ -3106,16 +3106,16 @@
           <a:cs typeface="+mn-cs"/>
         </a:defRPr>
       </a:lvl2pPr>
-      <a:lvl3pPr marL="1143000" indent="-228600" algn="l" defTabSz="914400" rtl="0" eaLnBrk="1" latinLnBrk="0" hangingPunct="1">
+      <a:lvl3pPr marL="548754" indent="-109751" algn="l" defTabSz="439003" rtl="0" eaLnBrk="1" latinLnBrk="0" hangingPunct="1">
         <a:lnSpc>
           <a:spcPct val="90000"/>
         </a:lnSpc>
         <a:spcBef>
-          <a:spcPts val="500"/>
+          <a:spcPts val="240"/>
         </a:spcBef>
         <a:buFont typeface="Arial" panose="020B0604020202020204" pitchFamily="34" charset="0"/>
         <a:buChar char="•"/>
-        <a:defRPr sz="2000" kern="1200">
+        <a:defRPr sz="960" kern="1200">
           <a:solidFill>
             <a:schemeClr val="tx1"/>
           </a:solidFill>
@@ -3124,16 +3124,16 @@
           <a:cs typeface="+mn-cs"/>
         </a:defRPr>
       </a:lvl3pPr>
-      <a:lvl4pPr marL="1600200" indent="-228600" algn="l" defTabSz="914400" rtl="0" eaLnBrk="1" latinLnBrk="0" hangingPunct="1">
+      <a:lvl4pPr marL="768256" indent="-109751" algn="l" defTabSz="439003" rtl="0" eaLnBrk="1" latinLnBrk="0" hangingPunct="1">
         <a:lnSpc>
           <a:spcPct val="90000"/>
         </a:lnSpc>
         <a:spcBef>
-          <a:spcPts val="500"/>
+          <a:spcPts val="240"/>
         </a:spcBef>
         <a:buFont typeface="Arial" panose="020B0604020202020204" pitchFamily="34" charset="0"/>
         <a:buChar char="•"/>
-        <a:defRPr sz="1800" kern="1200">
+        <a:defRPr sz="864" kern="1200">
           <a:solidFill>
             <a:schemeClr val="tx1"/>
           </a:solidFill>
@@ -3142,16 +3142,16 @@
           <a:cs typeface="+mn-cs"/>
         </a:defRPr>
       </a:lvl4pPr>
-      <a:lvl5pPr marL="2057400" indent="-228600" algn="l" defTabSz="914400" rtl="0" eaLnBrk="1" latinLnBrk="0" hangingPunct="1">
+      <a:lvl5pPr marL="987758" indent="-109751" algn="l" defTabSz="439003" rtl="0" eaLnBrk="1" latinLnBrk="0" hangingPunct="1">
         <a:lnSpc>
           <a:spcPct val="90000"/>
         </a:lnSpc>
         <a:spcBef>
-          <a:spcPts val="500"/>
+          <a:spcPts val="240"/>
         </a:spcBef>
         <a:buFont typeface="Arial" panose="020B0604020202020204" pitchFamily="34" charset="0"/>
         <a:buChar char="•"/>
-        <a:defRPr sz="1800" kern="1200">
+        <a:defRPr sz="864" kern="1200">
           <a:solidFill>
             <a:schemeClr val="tx1"/>
           </a:solidFill>
@@ -3160,16 +3160,16 @@
           <a:cs typeface="+mn-cs"/>
         </a:defRPr>
       </a:lvl5pPr>
-      <a:lvl6pPr marL="2514600" indent="-228600" algn="l" defTabSz="914400" rtl="0" eaLnBrk="1" latinLnBrk="0" hangingPunct="1">
+      <a:lvl6pPr marL="1207259" indent="-109751" algn="l" defTabSz="439003" rtl="0" eaLnBrk="1" latinLnBrk="0" hangingPunct="1">
         <a:lnSpc>
           <a:spcPct val="90000"/>
         </a:lnSpc>
         <a:spcBef>
-          <a:spcPts val="500"/>
+          <a:spcPts val="240"/>
         </a:spcBef>
         <a:buFont typeface="Arial" panose="020B0604020202020204" pitchFamily="34" charset="0"/>
         <a:buChar char="•"/>
-        <a:defRPr sz="1800" kern="1200">
+        <a:defRPr sz="864" kern="1200">
           <a:solidFill>
             <a:schemeClr val="tx1"/>
           </a:solidFill>
@@ -3178,16 +3178,16 @@
           <a:cs typeface="+mn-cs"/>
         </a:defRPr>
       </a:lvl6pPr>
-      <a:lvl7pPr marL="2971800" indent="-228600" algn="l" defTabSz="914400" rtl="0" eaLnBrk="1" latinLnBrk="0" hangingPunct="1">
+      <a:lvl7pPr marL="1426761" indent="-109751" algn="l" defTabSz="439003" rtl="0" eaLnBrk="1" latinLnBrk="0" hangingPunct="1">
         <a:lnSpc>
           <a:spcPct val="90000"/>
         </a:lnSpc>
         <a:spcBef>
-          <a:spcPts val="500"/>
+          <a:spcPts val="240"/>
         </a:spcBef>
         <a:buFont typeface="Arial" panose="020B0604020202020204" pitchFamily="34" charset="0"/>
         <a:buChar char="•"/>
-        <a:defRPr sz="1800" kern="1200">
+        <a:defRPr sz="864" kern="1200">
           <a:solidFill>
             <a:schemeClr val="tx1"/>
           </a:solidFill>
@@ -3196,16 +3196,16 @@
           <a:cs typeface="+mn-cs"/>
         </a:defRPr>
       </a:lvl7pPr>
-      <a:lvl8pPr marL="3429000" indent="-228600" algn="l" defTabSz="914400" rtl="0" eaLnBrk="1" latinLnBrk="0" hangingPunct="1">
+      <a:lvl8pPr marL="1646263" indent="-109751" algn="l" defTabSz="439003" rtl="0" eaLnBrk="1" latinLnBrk="0" hangingPunct="1">
         <a:lnSpc>
           <a:spcPct val="90000"/>
         </a:lnSpc>
         <a:spcBef>
-          <a:spcPts val="500"/>
+          <a:spcPts val="240"/>
         </a:spcBef>
         <a:buFont typeface="Arial" panose="020B0604020202020204" pitchFamily="34" charset="0"/>
         <a:buChar char="•"/>
-        <a:defRPr sz="1800" kern="1200">
+        <a:defRPr sz="864" kern="1200">
           <a:solidFill>
             <a:schemeClr val="tx1"/>
           </a:solidFill>
@@ -3214,16 +3214,16 @@
           <a:cs typeface="+mn-cs"/>
         </a:defRPr>
       </a:lvl8pPr>
-      <a:lvl9pPr marL="3886200" indent="-228600" algn="l" defTabSz="914400" rtl="0" eaLnBrk="1" latinLnBrk="0" hangingPunct="1">
+      <a:lvl9pPr marL="1865765" indent="-109751" algn="l" defTabSz="439003" rtl="0" eaLnBrk="1" latinLnBrk="0" hangingPunct="1">
         <a:lnSpc>
           <a:spcPct val="90000"/>
         </a:lnSpc>
         <a:spcBef>
-          <a:spcPts val="500"/>
+          <a:spcPts val="240"/>
         </a:spcBef>
         <a:buFont typeface="Arial" panose="020B0604020202020204" pitchFamily="34" charset="0"/>
         <a:buChar char="•"/>
-        <a:defRPr sz="1800" kern="1200">
+        <a:defRPr sz="864" kern="1200">
           <a:solidFill>
             <a:schemeClr val="tx1"/>
           </a:solidFill>
@@ -3237,8 +3237,8 @@
       <a:defPPr>
         <a:defRPr lang="en-US"/>
       </a:defPPr>
-      <a:lvl1pPr marL="0" algn="l" defTabSz="914400" rtl="0" eaLnBrk="1" latinLnBrk="0" hangingPunct="1">
-        <a:defRPr sz="1800" kern="1200">
+      <a:lvl1pPr marL="0" algn="l" defTabSz="439003" rtl="0" eaLnBrk="1" latinLnBrk="0" hangingPunct="1">
+        <a:defRPr sz="864" kern="1200">
           <a:solidFill>
             <a:schemeClr val="tx1"/>
           </a:solidFill>
@@ -3247,8 +3247,8 @@
           <a:cs typeface="+mn-cs"/>
         </a:defRPr>
       </a:lvl1pPr>
-      <a:lvl2pPr marL="457200" algn="l" defTabSz="914400" rtl="0" eaLnBrk="1" latinLnBrk="0" hangingPunct="1">
-        <a:defRPr sz="1800" kern="1200">
+      <a:lvl2pPr marL="219502" algn="l" defTabSz="439003" rtl="0" eaLnBrk="1" latinLnBrk="0" hangingPunct="1">
+        <a:defRPr sz="864" kern="1200">
           <a:solidFill>
             <a:schemeClr val="tx1"/>
           </a:solidFill>
@@ -3257,8 +3257,8 @@
           <a:cs typeface="+mn-cs"/>
         </a:defRPr>
       </a:lvl2pPr>
-      <a:lvl3pPr marL="914400" algn="l" defTabSz="914400" rtl="0" eaLnBrk="1" latinLnBrk="0" hangingPunct="1">
-        <a:defRPr sz="1800" kern="1200">
+      <a:lvl3pPr marL="439003" algn="l" defTabSz="439003" rtl="0" eaLnBrk="1" latinLnBrk="0" hangingPunct="1">
+        <a:defRPr sz="864" kern="1200">
           <a:solidFill>
             <a:schemeClr val="tx1"/>
           </a:solidFill>
@@ -3267,8 +3267,8 @@
           <a:cs typeface="+mn-cs"/>
         </a:defRPr>
       </a:lvl3pPr>
-      <a:lvl4pPr marL="1371600" algn="l" defTabSz="914400" rtl="0" eaLnBrk="1" latinLnBrk="0" hangingPunct="1">
-        <a:defRPr sz="1800" kern="1200">
+      <a:lvl4pPr marL="658505" algn="l" defTabSz="439003" rtl="0" eaLnBrk="1" latinLnBrk="0" hangingPunct="1">
+        <a:defRPr sz="864" kern="1200">
           <a:solidFill>
             <a:schemeClr val="tx1"/>
           </a:solidFill>
@@ -3277,8 +3277,8 @@
           <a:cs typeface="+mn-cs"/>
         </a:defRPr>
       </a:lvl4pPr>
-      <a:lvl5pPr marL="1828800" algn="l" defTabSz="914400" rtl="0" eaLnBrk="1" latinLnBrk="0" hangingPunct="1">
-        <a:defRPr sz="1800" kern="1200">
+      <a:lvl5pPr marL="878007" algn="l" defTabSz="439003" rtl="0" eaLnBrk="1" latinLnBrk="0" hangingPunct="1">
+        <a:defRPr sz="864" kern="1200">
           <a:solidFill>
             <a:schemeClr val="tx1"/>
           </a:solidFill>
@@ -3287,8 +3287,8 @@
           <a:cs typeface="+mn-cs"/>
         </a:defRPr>
       </a:lvl5pPr>
-      <a:lvl6pPr marL="2286000" algn="l" defTabSz="914400" rtl="0" eaLnBrk="1" latinLnBrk="0" hangingPunct="1">
-        <a:defRPr sz="1800" kern="1200">
+      <a:lvl6pPr marL="1097509" algn="l" defTabSz="439003" rtl="0" eaLnBrk="1" latinLnBrk="0" hangingPunct="1">
+        <a:defRPr sz="864" kern="1200">
           <a:solidFill>
             <a:schemeClr val="tx1"/>
           </a:solidFill>
@@ -3297,8 +3297,8 @@
           <a:cs typeface="+mn-cs"/>
         </a:defRPr>
       </a:lvl6pPr>
-      <a:lvl7pPr marL="2743200" algn="l" defTabSz="914400" rtl="0" eaLnBrk="1" latinLnBrk="0" hangingPunct="1">
-        <a:defRPr sz="1800" kern="1200">
+      <a:lvl7pPr marL="1317010" algn="l" defTabSz="439003" rtl="0" eaLnBrk="1" latinLnBrk="0" hangingPunct="1">
+        <a:defRPr sz="864" kern="1200">
           <a:solidFill>
             <a:schemeClr val="tx1"/>
           </a:solidFill>
@@ -3307,8 +3307,8 @@
           <a:cs typeface="+mn-cs"/>
         </a:defRPr>
       </a:lvl7pPr>
-      <a:lvl8pPr marL="3200400" algn="l" defTabSz="914400" rtl="0" eaLnBrk="1" latinLnBrk="0" hangingPunct="1">
-        <a:defRPr sz="1800" kern="1200">
+      <a:lvl8pPr marL="1536512" algn="l" defTabSz="439003" rtl="0" eaLnBrk="1" latinLnBrk="0" hangingPunct="1">
+        <a:defRPr sz="864" kern="1200">
           <a:solidFill>
             <a:schemeClr val="tx1"/>
           </a:solidFill>
@@ -3317,8 +3317,8 @@
           <a:cs typeface="+mn-cs"/>
         </a:defRPr>
       </a:lvl8pPr>
-      <a:lvl9pPr marL="3657600" algn="l" defTabSz="914400" rtl="0" eaLnBrk="1" latinLnBrk="0" hangingPunct="1">
-        <a:defRPr sz="1800" kern="1200">
+      <a:lvl9pPr marL="1756014" algn="l" defTabSz="439003" rtl="0" eaLnBrk="1" latinLnBrk="0" hangingPunct="1">
+        <a:defRPr sz="864" kern="1200">
           <a:solidFill>
             <a:schemeClr val="tx1"/>
           </a:solidFill>
@@ -3371,8 +3371,8 @@
         </p:blipFill>
         <p:spPr>
           <a:xfrm>
-            <a:off x="360545" y="1583128"/>
-            <a:ext cx="11655846" cy="3194355"/>
+            <a:off x="-7239" y="-50800"/>
+            <a:ext cx="12199239" cy="3343275"/>
           </a:xfrm>
           <a:prstGeom prst="rect">
             <a:avLst/>
@@ -3437,8 +3437,8 @@
         </p:blipFill>
         <p:spPr>
           <a:xfrm>
-            <a:off x="211839" y="1511208"/>
-            <a:ext cx="11768322" cy="3225179"/>
+            <a:off x="0" y="-36988"/>
+            <a:ext cx="12148843" cy="3329463"/>
           </a:xfrm>
           <a:prstGeom prst="rect">
             <a:avLst/>
@@ -3503,8 +3503,8 @@
         </p:blipFill>
         <p:spPr>
           <a:xfrm>
-            <a:off x="247436" y="1500934"/>
-            <a:ext cx="11393426" cy="3122437"/>
+            <a:off x="-7239" y="-50800"/>
+            <a:ext cx="12199239" cy="3343275"/>
           </a:xfrm>
           <a:prstGeom prst="rect">
             <a:avLst/>
@@ -3525,9 +3525,9 @@
 </file>
 
 <file path=ppt/theme/theme1.xml><?xml version="1.0" encoding="utf-8"?>
-<a:theme xmlns:a="http://schemas.openxmlformats.org/drawingml/2006/main" name="Tema de Office">
+<a:theme xmlns:a="http://schemas.openxmlformats.org/drawingml/2006/main" name="Office 2013 - 2022 Theme">
   <a:themeElements>
-    <a:clrScheme name="Tema de Office">
+    <a:clrScheme name="Office 2013 - 2022 Theme">
       <a:dk1>
         <a:sysClr val="windowText" lastClr="000000"/>
       </a:dk1>
@@ -3565,9 +3565,9 @@
         <a:srgbClr val="954F72"/>
       </a:folHlink>
     </a:clrScheme>
-    <a:fontScheme name="Tema de Office">
+    <a:fontScheme name="Office 2013 - 2022 Theme">
       <a:majorFont>
-        <a:latin typeface="Calibri Light"/>
+        <a:latin typeface="Calibri Light" panose="020F0302020204030204"/>
         <a:ea typeface=""/>
         <a:cs typeface=""/>
         <a:font script="Jpan" typeface="游ゴシック Light"/>
@@ -3602,7 +3602,7 @@
         <a:font script="Geor" typeface="Sylfaen"/>
       </a:majorFont>
       <a:minorFont>
-        <a:latin typeface="Calibri"/>
+        <a:latin typeface="Calibri" panose="020F0502020204030204"/>
         <a:ea typeface=""/>
         <a:cs typeface=""/>
         <a:font script="Jpan" typeface="游ゴシック"/>
@@ -3637,7 +3637,7 @@
         <a:font script="Geor" typeface="Sylfaen"/>
       </a:minorFont>
     </a:fontScheme>
-    <a:fmtScheme name="Tema de Office">
+    <a:fmtScheme name="Office 2013 - 2022 Theme">
       <a:fillStyleLst>
         <a:solidFill>
           <a:schemeClr val="phClr"/>
